--- a/content/Lectures/Semester 1/Week 9/1 Lecture/1.9 Generative AI and Prompt Engineering (Lecture).pptx
+++ b/content/Lectures/Semester 1/Week 9/1 Lecture/1.9 Generative AI and Prompt Engineering (Lecture).pptx
@@ -5367,7 +5367,7 @@
           <a:p>
             <a:r>
               <a:rPr lang="en-GB" b="1" dirty="0"/>
-              <a:t>AI trend </a:t>
+              <a:t>AI Trends</a:t>
             </a:r>
           </a:p>
         </p:txBody>
